--- a/skills/ichita-design/office/ICHITA-Presentation-Template.pptx
+++ b/skills/ichita-design/office/ICHITA-Presentation-Template.pptx
@@ -3032,7 +3032,7 @@
                 <a:ea typeface="TH Aeonik" pitchFamily="34" charset="-122"/>
                 <a:cs typeface="TH Aeonik" pitchFamily="34" charset="-120"/>
               </a:rPr>
-              <a:t>ICHITA Technology Co., Ltd. · www.ichita.co.th</a:t>
+              <a:t>ICHITA Co., Ltd. · www.ichita.co.th</a:t>
             </a:r>
             <a:endParaRPr lang="en-US" sz="1500" dirty="0"/>
           </a:p>
